--- a/content/学习笔记/复试准备/面试.pptx
+++ b/content/学习笔记/复试准备/面试.pptx
@@ -249,7 +249,7 @@
           <a:p>
             <a:fld id="{D2A48B96-639E-45A3-A0BA-2464DFDB1FAA}" type="datetimeFigureOut">
               <a:rPr lang="zh-CN" altLang="en-US" smtClean="0"/>
-              <a:t>2026/9/13</a:t>
+              <a:t>2026/9/17</a:t>
             </a:fld>
             <a:endParaRPr lang="zh-CN" altLang="en-US"/>
           </a:p>
@@ -556,6 +556,67 @@
     </p:spTree>
     <p:extLst>
       <p:ext uri="{BB962C8B-B14F-4D97-AF65-F5344CB8AC3E}">
+        <p14:creationId xmlns:p14="http://schemas.microsoft.com/office/powerpoint/2010/main" val="3504637609"/>
+      </p:ext>
+    </p:extLst>
+  </p:cSld>
+  <p:clrMapOvr>
+    <a:masterClrMapping/>
+  </p:clrMapOvr>
+</p:notes>
+</file>
+
+<file path=ppt/notesSlides/notesSlide2.xml><?xml version="1.0" encoding="utf-8"?>
+<p:notes xmlns:a="http://schemas.openxmlformats.org/drawingml/2006/main" xmlns:r="http://schemas.openxmlformats.org/officeDocument/2006/relationships" xmlns:p="http://schemas.openxmlformats.org/presentationml/2006/main">
+  <p:cSld>
+    <p:spTree>
+      <p:nvGrpSpPr>
+        <p:cNvPr id="1" name=""/>
+        <p:cNvGrpSpPr/>
+        <p:nvPr/>
+      </p:nvGrpSpPr>
+      <p:grpSpPr>
+        <a:xfrm>
+          <a:off x="0" y="0"/>
+          <a:ext cx="0" cy="0"/>
+          <a:chOff x="0" y="0"/>
+          <a:chExt cx="0" cy="0"/>
+        </a:xfrm>
+      </p:grpSpPr>
+      <p:sp>
+        <p:nvSpPr>
+          <p:cNvPr id="2" name="幻灯片图像占位符 1"/>
+          <p:cNvSpPr>
+            <a:spLocks noGrp="1" noRot="1" noChangeAspect="1"/>
+          </p:cNvSpPr>
+          <p:nvPr>
+            <p:ph type="sldImg"/>
+          </p:nvPr>
+        </p:nvSpPr>
+        <p:spPr/>
+      </p:sp>
+      <p:sp>
+        <p:nvSpPr>
+          <p:cNvPr id="3" name="备注占位符 2"/>
+          <p:cNvSpPr>
+            <a:spLocks noGrp="1"/>
+          </p:cNvSpPr>
+          <p:nvPr>
+            <p:ph type="body" idx="1"/>
+          </p:nvPr>
+        </p:nvSpPr>
+        <p:spPr/>
+        <p:txBody>
+          <a:bodyPr/>
+          <a:lstStyle/>
+          <a:p>
+            <a:endParaRPr lang="zh-CN" altLang="en-US" dirty="0"/>
+          </a:p>
+        </p:txBody>
+      </p:sp>
+    </p:spTree>
+    <p:extLst>
+      <p:ext uri="{BB962C8B-B14F-4D97-AF65-F5344CB8AC3E}">
         <p14:creationId xmlns:p14="http://schemas.microsoft.com/office/powerpoint/2010/main" val="3019032563"/>
       </p:ext>
     </p:extLst>
@@ -566,7 +627,7 @@
 </p:notes>
 </file>
 
-<file path=ppt/notesSlides/notesSlide2.xml><?xml version="1.0" encoding="utf-8"?>
+<file path=ppt/notesSlides/notesSlide3.xml><?xml version="1.0" encoding="utf-8"?>
 <p:notes xmlns:a="http://schemas.openxmlformats.org/drawingml/2006/main" xmlns:r="http://schemas.openxmlformats.org/officeDocument/2006/relationships" xmlns:p="http://schemas.openxmlformats.org/presentationml/2006/main">
   <p:cSld>
     <p:spTree>
@@ -630,7 +691,7 @@
 </p:notes>
 </file>
 
-<file path=ppt/notesSlides/notesSlide3.xml><?xml version="1.0" encoding="utf-8"?>
+<file path=ppt/notesSlides/notesSlide4.xml><?xml version="1.0" encoding="utf-8"?>
 <p:notes xmlns:a="http://schemas.openxmlformats.org/drawingml/2006/main" xmlns:r="http://schemas.openxmlformats.org/officeDocument/2006/relationships" xmlns:p="http://schemas.openxmlformats.org/presentationml/2006/main">
   <p:cSld>
     <p:spTree>
@@ -695,7 +756,7 @@
 </p:notes>
 </file>
 
-<file path=ppt/notesSlides/notesSlide4.xml><?xml version="1.0" encoding="utf-8"?>
+<file path=ppt/notesSlides/notesSlide5.xml><?xml version="1.0" encoding="utf-8"?>
 <p:notes xmlns:a="http://schemas.openxmlformats.org/drawingml/2006/main" xmlns:r="http://schemas.openxmlformats.org/officeDocument/2006/relationships" xmlns:p="http://schemas.openxmlformats.org/presentationml/2006/main">
   <p:cSld>
     <p:spTree>
@@ -4997,7 +5058,7 @@
 </file>
 
 <file path=ppt/slides/slide2.xml><?xml version="1.0" encoding="utf-8"?>
-<p:sld xmlns:a="http://schemas.openxmlformats.org/drawingml/2006/main" xmlns:r="http://schemas.openxmlformats.org/officeDocument/2006/relationships" xmlns:p="http://schemas.openxmlformats.org/presentationml/2006/main">
+<p:sld xmlns:a="http://schemas.openxmlformats.org/drawingml/2006/main" xmlns:r="http://schemas.openxmlformats.org/officeDocument/2006/relationships" xmlns:p="http://schemas.openxmlformats.org/presentationml/2006/main" show="0">
   <p:cSld>
     <p:spTree>
       <p:nvGrpSpPr>
@@ -9166,7 +9227,7 @@
                   <a:cs typeface="+mn-ea"/>
                   <a:sym typeface="+mn-lt"/>
                 </a:rPr>
-                <a:t>4.12 / 5.0</a:t>
+                <a:t>4.42 / 5.0</a:t>
               </a:r>
               <a:endParaRPr lang="zh-CN" altLang="en-US" dirty="0">
                 <a:solidFill>
@@ -11405,9 +11466,9 @@
         <p:grpSpPr>
           <a:xfrm>
             <a:off x="418997" y="2043245"/>
-            <a:ext cx="8542124" cy="4227818"/>
+            <a:ext cx="8863548" cy="4227818"/>
             <a:chOff x="664356" y="1994131"/>
-            <a:chExt cx="8542124" cy="4227818"/>
+            <a:chExt cx="8863548" cy="4227818"/>
           </a:xfrm>
         </p:grpSpPr>
         <p:grpSp>
@@ -11604,9 +11665,9 @@
           <p:grpSpPr>
             <a:xfrm>
               <a:off x="664356" y="3957547"/>
-              <a:ext cx="8542124" cy="2264402"/>
+              <a:ext cx="8863548" cy="2264402"/>
               <a:chOff x="468413" y="3052607"/>
-              <a:chExt cx="8542124" cy="2264402"/>
+              <a:chExt cx="8863548" cy="2264402"/>
             </a:xfrm>
           </p:grpSpPr>
           <p:sp>
@@ -11681,7 +11742,7 @@
             <p:spPr>
               <a:xfrm>
                 <a:off x="2316331" y="3052607"/>
-                <a:ext cx="6694206" cy="2264402"/>
+                <a:ext cx="7015630" cy="2264402"/>
               </a:xfrm>
               <a:prstGeom prst="rect">
                 <a:avLst/>
@@ -11709,7 +11770,46 @@
                     <a:cs typeface="+mn-ea"/>
                     <a:sym typeface="+mn-lt"/>
                   </a:rPr>
-                  <a:t>使用 </a:t>
+                  <a:t>基于 </a:t>
+                </a:r>
+                <a:r>
+                  <a:rPr lang="en-US" altLang="zh-CN" sz="1600" dirty="0" err="1">
+                    <a:solidFill>
+                      <a:schemeClr val="tx1">
+                        <a:lumMod val="65000"/>
+                        <a:lumOff val="35000"/>
+                      </a:schemeClr>
+                    </a:solidFill>
+                    <a:cs typeface="+mn-ea"/>
+                    <a:sym typeface="+mn-lt"/>
+                  </a:rPr>
+                  <a:t>VisionFM</a:t>
+                </a:r>
+                <a:r>
+                  <a:rPr lang="en-US" altLang="zh-CN" sz="1600" dirty="0">
+                    <a:solidFill>
+                      <a:schemeClr val="tx1">
+                        <a:lumMod val="65000"/>
+                        <a:lumOff val="35000"/>
+                      </a:schemeClr>
+                    </a:solidFill>
+                    <a:cs typeface="+mn-ea"/>
+                    <a:sym typeface="+mn-lt"/>
+                  </a:rPr>
+                  <a:t> </a:t>
+                </a:r>
+                <a:r>
+                  <a:rPr lang="zh-CN" altLang="en-US" sz="1600" dirty="0">
+                    <a:solidFill>
+                      <a:schemeClr val="tx1">
+                        <a:lumMod val="65000"/>
+                        <a:lumOff val="35000"/>
+                      </a:schemeClr>
+                    </a:solidFill>
+                    <a:cs typeface="+mn-ea"/>
+                    <a:sym typeface="+mn-lt"/>
+                  </a:rPr>
+                  <a:t>的 </a:t>
                 </a:r>
                 <a:r>
                   <a:rPr lang="en-US" altLang="zh-CN" sz="1600" dirty="0">
@@ -11774,7 +11874,7 @@
                     <a:cs typeface="+mn-ea"/>
                     <a:sym typeface="+mn-lt"/>
                   </a:rPr>
-                  <a:t>编码器提取多层 </a:t>
+                  <a:t>编码器，完成眼底数据集适配、预训练权重加载及下游任务复现：利用编码器提取多层 </a:t>
                 </a:r>
                 <a:r>
                   <a:rPr lang="en-US" altLang="zh-CN" sz="1600" dirty="0">
@@ -11800,7 +11900,7 @@
                     <a:cs typeface="+mn-ea"/>
                     <a:sym typeface="+mn-lt"/>
                   </a:rPr>
-                  <a:t>特征，在 </a:t>
+                  <a:t>特征，分别训练 </a:t>
                 </a:r>
                 <a:r>
                   <a:rPr lang="en-US" altLang="zh-CN" sz="1600" dirty="0">
@@ -11826,7 +11926,7 @@
                     <a:cs typeface="+mn-ea"/>
                     <a:sym typeface="+mn-lt"/>
                   </a:rPr>
-                  <a:t>任务中训练分类头，在眼底血管分割任务中接入 </a:t>
+                  <a:t>分类头和 </a:t>
                 </a:r>
                 <a:r>
                   <a:rPr lang="en-US" altLang="zh-CN" sz="1600" dirty="0">
@@ -11852,7 +11952,7 @@
                     <a:cs typeface="+mn-ea"/>
                     <a:sym typeface="+mn-lt"/>
                   </a:rPr>
-                  <a:t>解码器，并使用 </a:t>
+                  <a:t>分割解码器，实现从图像特征提取到分类、像素级分割和结果评估的完整流程；使用 </a:t>
                 </a:r>
                 <a:r>
                   <a:rPr lang="en-US" altLang="zh-CN" sz="1600" dirty="0">
@@ -11943,7 +12043,7 @@
                     <a:cs typeface="+mn-ea"/>
                     <a:sym typeface="+mn-lt"/>
                   </a:rPr>
-                  <a:t>Dice </a:t>
+                  <a:t>Dice</a:t>
                 </a:r>
                 <a:r>
                   <a:rPr lang="zh-CN" altLang="en-US" sz="1600" dirty="0">
@@ -11956,7 +12056,7 @@
                     <a:cs typeface="+mn-ea"/>
                     <a:sym typeface="+mn-lt"/>
                   </a:rPr>
-                  <a:t>和 </a:t>
+                  <a:t>、</a:t>
                 </a:r>
                 <a:r>
                   <a:rPr lang="en-US" altLang="zh-CN" sz="1600" dirty="0" err="1">
@@ -11995,7 +12095,7 @@
                     <a:cs typeface="+mn-ea"/>
                     <a:sym typeface="+mn-lt"/>
                   </a:rPr>
-                  <a:t>进行评估；针对 </a:t>
+                  <a:t>等指标进行验证并完成可视化；进一步复现 </a:t>
                 </a:r>
                 <a:r>
                   <a:rPr lang="en-US" altLang="zh-CN" sz="1600" dirty="0" err="1">
@@ -12034,7 +12134,7 @@
                     <a:cs typeface="+mn-ea"/>
                     <a:sym typeface="+mn-lt"/>
                   </a:rPr>
-                  <a:t>微动脉瘤检测，我复现了 </a:t>
+                  <a:t>微动脉瘤检测公开方法；参与将模型封装为 </a:t>
                 </a:r>
                 <a:r>
                   <a:rPr lang="en-US" altLang="zh-CN" sz="1600" dirty="0" err="1">
@@ -12047,7 +12147,7 @@
                     <a:cs typeface="+mn-ea"/>
                     <a:sym typeface="+mn-lt"/>
                   </a:rPr>
-                  <a:t>MSRNet</a:t>
+                  <a:t>FastAPI</a:t>
                 </a:r>
                 <a:r>
                   <a:rPr lang="en-US" altLang="zh-CN" sz="1600" dirty="0">
@@ -12073,111 +12173,7 @@
                     <a:cs typeface="+mn-ea"/>
                     <a:sym typeface="+mn-lt"/>
                   </a:rPr>
-                  <a:t>的灰度化、</a:t>
-                </a:r>
-                <a:r>
-                  <a:rPr lang="en-US" altLang="zh-CN" sz="1600" dirty="0">
-                    <a:solidFill>
-                      <a:schemeClr val="tx1">
-                        <a:lumMod val="65000"/>
-                        <a:lumOff val="35000"/>
-                      </a:schemeClr>
-                    </a:solidFill>
-                    <a:cs typeface="+mn-ea"/>
-                    <a:sym typeface="+mn-lt"/>
-                  </a:rPr>
-                  <a:t>CLAHE</a:t>
-                </a:r>
-                <a:r>
-                  <a:rPr lang="zh-CN" altLang="en-US" sz="1600" dirty="0">
-                    <a:solidFill>
-                      <a:schemeClr val="tx1">
-                        <a:lumMod val="65000"/>
-                        <a:lumOff val="35000"/>
-                      </a:schemeClr>
-                    </a:solidFill>
-                    <a:cs typeface="+mn-ea"/>
-                    <a:sym typeface="+mn-lt"/>
-                  </a:rPr>
-                  <a:t>、</a:t>
-                </a:r>
-                <a:r>
-                  <a:rPr lang="en-US" altLang="zh-CN" sz="1600" dirty="0">
-                    <a:solidFill>
-                      <a:schemeClr val="tx1">
-                        <a:lumMod val="65000"/>
-                        <a:lumOff val="35000"/>
-                      </a:schemeClr>
-                    </a:solidFill>
-                    <a:cs typeface="+mn-ea"/>
-                    <a:sym typeface="+mn-lt"/>
-                  </a:rPr>
-                  <a:t>Gamma </a:t>
-                </a:r>
-                <a:r>
-                  <a:rPr lang="zh-CN" altLang="en-US" sz="1600" dirty="0">
-                    <a:solidFill>
-                      <a:schemeClr val="tx1">
-                        <a:lumMod val="65000"/>
-                        <a:lumOff val="35000"/>
-                      </a:schemeClr>
-                    </a:solidFill>
-                    <a:cs typeface="+mn-ea"/>
-                    <a:sym typeface="+mn-lt"/>
-                  </a:rPr>
-                  <a:t>校正和 </a:t>
-                </a:r>
-                <a:r>
-                  <a:rPr lang="en-US" altLang="zh-CN" sz="1600" dirty="0">
-                    <a:solidFill>
-                      <a:schemeClr val="tx1">
-                        <a:lumMod val="65000"/>
-                        <a:lumOff val="35000"/>
-                      </a:schemeClr>
-                    </a:solidFill>
-                    <a:cs typeface="+mn-ea"/>
-                    <a:sym typeface="+mn-lt"/>
-                  </a:rPr>
-                  <a:t>96×96 </a:t>
-                </a:r>
-                <a:r>
-                  <a:rPr lang="zh-CN" altLang="en-US" sz="1600" dirty="0">
-                    <a:solidFill>
-                      <a:schemeClr val="tx1">
-                        <a:lumMod val="65000"/>
-                        <a:lumOff val="35000"/>
-                      </a:schemeClr>
-                    </a:solidFill>
-                    <a:cs typeface="+mn-ea"/>
-                    <a:sym typeface="+mn-lt"/>
-                  </a:rPr>
-                  <a:t>重叠滑窗推理流程，通过概率图重建、阈值化和连通域分析得到病灶结果，最后将这些模型接入 </a:t>
-                </a:r>
-                <a:r>
-                  <a:rPr lang="en-US" altLang="zh-CN" sz="1600" dirty="0" err="1">
-                    <a:solidFill>
-                      <a:schemeClr val="tx1">
-                        <a:lumMod val="65000"/>
-                        <a:lumOff val="35000"/>
-                      </a:schemeClr>
-                    </a:solidFill>
-                    <a:cs typeface="+mn-ea"/>
-                    <a:sym typeface="+mn-lt"/>
-                  </a:rPr>
-                  <a:t>FastAPI</a:t>
-                </a:r>
-                <a:r>
-                  <a:rPr lang="zh-CN" altLang="en-US" sz="1600" dirty="0">
-                    <a:solidFill>
-                      <a:schemeClr val="tx1">
-                        <a:lumMod val="65000"/>
-                        <a:lumOff val="35000"/>
-                      </a:schemeClr>
-                    </a:solidFill>
-                    <a:cs typeface="+mn-ea"/>
-                    <a:sym typeface="+mn-lt"/>
-                  </a:rPr>
-                  <a:t>，并结合通义千问生成辅助分析报告。</a:t>
+                  <a:t>多任务接口，并结合通义千问多模态模型生成辅助分析报告。</a:t>
                 </a:r>
               </a:p>
             </p:txBody>
@@ -12839,33 +12835,7 @@
                   <a:cs typeface="+mn-ea"/>
                   <a:sym typeface="+mn-lt"/>
                 </a:rPr>
-                <a:t>周面板；采用 </a:t>
-              </a:r>
-              <a:r>
-                <a:rPr lang="en-GB" altLang="zh-CN" sz="1600" dirty="0">
-                  <a:solidFill>
-                    <a:schemeClr val="tx1">
-                      <a:lumMod val="65000"/>
-                      <a:lumOff val="35000"/>
-                    </a:schemeClr>
-                  </a:solidFill>
-                  <a:cs typeface="+mn-ea"/>
-                  <a:sym typeface="+mn-lt"/>
-                </a:rPr>
-                <a:t>Dirichlet </a:t>
-              </a:r>
-              <a:r>
-                <a:rPr lang="zh-CN" altLang="en-US" sz="1600" dirty="0">
-                  <a:solidFill>
-                    <a:schemeClr val="tx1">
-                      <a:lumMod val="65000"/>
-                      <a:lumOff val="35000"/>
-                    </a:schemeClr>
-                  </a:solidFill>
-                  <a:cs typeface="+mn-ea"/>
-                  <a:sym typeface="+mn-lt"/>
-                </a:rPr>
-                <a:t>先验、</a:t>
+                <a:t>周面板；采用狄利克雷先验、</a:t>
               </a:r>
               <a:r>
                 <a:rPr lang="en-GB" altLang="zh-CN" sz="1600" dirty="0">
@@ -12891,33 +12861,7 @@
                   <a:cs typeface="+mn-ea"/>
                   <a:sym typeface="+mn-lt"/>
                 </a:rPr>
-                <a:t>与 </a:t>
-              </a:r>
-              <a:r>
-                <a:rPr lang="en-GB" altLang="zh-CN" sz="1600" dirty="0">
-                  <a:solidFill>
-                    <a:schemeClr val="tx1">
-                      <a:lumMod val="65000"/>
-                      <a:lumOff val="35000"/>
-                    </a:schemeClr>
-                  </a:solidFill>
-                  <a:cs typeface="+mn-ea"/>
-                  <a:sym typeface="+mn-lt"/>
-                </a:rPr>
-                <a:t>Plackett-Luce/Bradley-Terry </a:t>
-              </a:r>
-              <a:r>
-                <a:rPr lang="zh-CN" altLang="en-US" sz="1600" dirty="0">
-                  <a:solidFill>
-                    <a:schemeClr val="tx1">
-                      <a:lumMod val="65000"/>
-                      <a:lumOff val="35000"/>
-                    </a:schemeClr>
-                  </a:solidFill>
-                  <a:cs typeface="+mn-ea"/>
-                  <a:sym typeface="+mn-lt"/>
-                </a:rPr>
-                <a:t>模型反演粉丝偏好，并通过后验预测、</a:t>
+                <a:t>与两种排序模型反演粉丝偏好，并通过后验预测、</a:t>
               </a:r>
               <a:r>
                 <a:rPr lang="en-GB" altLang="zh-CN" sz="1600" dirty="0">
@@ -13334,7 +13278,7 @@
         </p:blipFill>
         <p:spPr>
           <a:xfrm>
-            <a:off x="5344510" y="3568264"/>
+            <a:off x="5372219" y="3490679"/>
             <a:ext cx="6665573" cy="2979682"/>
           </a:xfrm>
           <a:prstGeom prst="rect">
